--- a/apps/web-playground/public/samples/02-editorial.pptx
+++ b/apps/web-playground/public/samples/02-editorial.pptx
@@ -1876,8 +1876,8 @@
         </p:nvSpPr>
         <p:spPr>
           <a:xfrm>
-            <a:off x="457200" y="5191125"/>
-            <a:ext cx="1905000" cy="133350"/>
+            <a:off x="457200" y="5219700"/>
+            <a:ext cx="1905000" cy="114300"/>
           </a:xfrm>
           <a:prstGeom prst="rect">
             <a:avLst/>
@@ -1938,8 +1938,8 @@
         </p:nvSpPr>
         <p:spPr>
           <a:xfrm>
-            <a:off x="2819400" y="5191125"/>
-            <a:ext cx="1914525" cy="133350"/>
+            <a:off x="2819400" y="5219700"/>
+            <a:ext cx="1914525" cy="114300"/>
           </a:xfrm>
           <a:prstGeom prst="rect">
             <a:avLst/>
@@ -2000,8 +2000,8 @@
         </p:nvSpPr>
         <p:spPr>
           <a:xfrm>
-            <a:off x="5191125" y="5191125"/>
-            <a:ext cx="1905000" cy="133350"/>
+            <a:off x="5191125" y="5219700"/>
+            <a:ext cx="1905000" cy="114300"/>
           </a:xfrm>
           <a:prstGeom prst="rect">
             <a:avLst/>
@@ -2317,8 +2317,8 @@
         </p:nvSpPr>
         <p:spPr>
           <a:xfrm>
-            <a:off x="3314700" y="2143125"/>
-            <a:ext cx="266700" cy="123825"/>
+            <a:off x="3314700" y="2171700"/>
+            <a:ext cx="266700" cy="95250"/>
           </a:xfrm>
           <a:prstGeom prst="rect">
             <a:avLst/>
@@ -2463,8 +2463,8 @@
         </p:nvSpPr>
         <p:spPr>
           <a:xfrm>
-            <a:off x="3314700" y="2543175"/>
-            <a:ext cx="266700" cy="123825"/>
+            <a:off x="3314700" y="2571750"/>
+            <a:ext cx="266700" cy="95250"/>
           </a:xfrm>
           <a:prstGeom prst="rect">
             <a:avLst/>
@@ -2609,8 +2609,8 @@
         </p:nvSpPr>
         <p:spPr>
           <a:xfrm>
-            <a:off x="3314700" y="2943225"/>
-            <a:ext cx="266700" cy="123825"/>
+            <a:off x="3314700" y="2971800"/>
+            <a:ext cx="266700" cy="95250"/>
           </a:xfrm>
           <a:prstGeom prst="rect">
             <a:avLst/>
@@ -2755,8 +2755,8 @@
         </p:nvSpPr>
         <p:spPr>
           <a:xfrm>
-            <a:off x="3314700" y="3343275"/>
-            <a:ext cx="266700" cy="123825"/>
+            <a:off x="3314700" y="3371850"/>
+            <a:ext cx="266700" cy="95250"/>
           </a:xfrm>
           <a:prstGeom prst="rect">
             <a:avLst/>
@@ -2837,8 +2837,8 @@
         </p:nvSpPr>
         <p:spPr>
           <a:xfrm>
-            <a:off x="3971925" y="2143125"/>
-            <a:ext cx="228600" cy="247650"/>
+            <a:off x="3971925" y="2266950"/>
+            <a:ext cx="228600" cy="123825"/>
           </a:xfrm>
           <a:prstGeom prst="rect">
             <a:avLst/>
@@ -2921,8 +2921,8 @@
         </p:nvSpPr>
         <p:spPr>
           <a:xfrm>
-            <a:off x="6829425" y="2143125"/>
-            <a:ext cx="266700" cy="247650"/>
+            <a:off x="6829425" y="2295525"/>
+            <a:ext cx="266700" cy="95250"/>
           </a:xfrm>
           <a:prstGeom prst="rect">
             <a:avLst/>
@@ -2983,8 +2983,8 @@
         </p:nvSpPr>
         <p:spPr>
           <a:xfrm>
-            <a:off x="3971925" y="2667000"/>
-            <a:ext cx="228600" cy="247650"/>
+            <a:off x="3971925" y="2790825"/>
+            <a:ext cx="228600" cy="123825"/>
           </a:xfrm>
           <a:prstGeom prst="rect">
             <a:avLst/>
@@ -3067,8 +3067,8 @@
         </p:nvSpPr>
         <p:spPr>
           <a:xfrm>
-            <a:off x="6829425" y="2667000"/>
-            <a:ext cx="266700" cy="247650"/>
+            <a:off x="6829425" y="2819400"/>
+            <a:ext cx="266700" cy="95250"/>
           </a:xfrm>
           <a:prstGeom prst="rect">
             <a:avLst/>
@@ -3213,8 +3213,8 @@
         </p:nvSpPr>
         <p:spPr>
           <a:xfrm>
-            <a:off x="6829425" y="3190875"/>
-            <a:ext cx="266700" cy="123825"/>
+            <a:off x="6829425" y="3219450"/>
+            <a:ext cx="266700" cy="95250"/>
           </a:xfrm>
           <a:prstGeom prst="rect">
             <a:avLst/>
@@ -3275,8 +3275,8 @@
         </p:nvSpPr>
         <p:spPr>
           <a:xfrm>
-            <a:off x="3971925" y="3590925"/>
-            <a:ext cx="228600" cy="247650"/>
+            <a:off x="3971925" y="3714750"/>
+            <a:ext cx="228600" cy="123825"/>
           </a:xfrm>
           <a:prstGeom prst="rect">
             <a:avLst/>
@@ -3359,8 +3359,8 @@
         </p:nvSpPr>
         <p:spPr>
           <a:xfrm>
-            <a:off x="6829425" y="3590925"/>
-            <a:ext cx="266700" cy="247650"/>
+            <a:off x="6829425" y="3743325"/>
+            <a:ext cx="266700" cy="95250"/>
           </a:xfrm>
           <a:prstGeom prst="rect">
             <a:avLst/>
@@ -7255,8 +7255,8 @@
         </p:nvSpPr>
         <p:spPr>
           <a:xfrm>
-            <a:off x="2162175" y="2743200"/>
-            <a:ext cx="1619250" cy="123825"/>
+            <a:off x="2162175" y="2781300"/>
+            <a:ext cx="1619250" cy="85725"/>
           </a:xfrm>
           <a:prstGeom prst="rect">
             <a:avLst/>
@@ -7381,8 +7381,8 @@
         </p:nvSpPr>
         <p:spPr>
           <a:xfrm>
-            <a:off x="2162175" y="3143250"/>
-            <a:ext cx="1619250" cy="123825"/>
+            <a:off x="2162175" y="3181350"/>
+            <a:ext cx="1619250" cy="85725"/>
           </a:xfrm>
           <a:prstGeom prst="rect">
             <a:avLst/>
@@ -7507,8 +7507,8 @@
         </p:nvSpPr>
         <p:spPr>
           <a:xfrm>
-            <a:off x="2162175" y="3552825"/>
-            <a:ext cx="1619250" cy="123825"/>
+            <a:off x="2162175" y="3590925"/>
+            <a:ext cx="1619250" cy="85725"/>
           </a:xfrm>
           <a:prstGeom prst="rect">
             <a:avLst/>
@@ -7633,8 +7633,8 @@
         </p:nvSpPr>
         <p:spPr>
           <a:xfrm>
-            <a:off x="2162175" y="3952875"/>
-            <a:ext cx="1619250" cy="123825"/>
+            <a:off x="2162175" y="3990975"/>
+            <a:ext cx="1619250" cy="85725"/>
           </a:xfrm>
           <a:prstGeom prst="rect">
             <a:avLst/>
